--- a/윤상훈_업그레이드_운영팀_VOC분석보고서.pptx
+++ b/윤상훈_업그레이드_운영팀_VOC분석보고서.pptx
@@ -3110,7 +3110,7 @@
                 <a:ea typeface="Pretendard" pitchFamily="34" charset="-122"/>
                 <a:cs typeface="Pretendard" pitchFamily="34" charset="-120"/>
               </a:rPr>
-              <a:t>팀업그레이드 운영팀 지원 자료로,</a:t>
+              <a:t>팀업그레이드코리아 운영팀 지원 자료로,</a:t>
             </a:r>
             <a:endParaRPr lang="en-US" sz="1100" dirty="0"/>
           </a:p>
@@ -3426,7 +3426,7 @@
                 <a:ea typeface="Pretendard" pitchFamily="34" charset="-122"/>
                 <a:cs typeface="Pretendard" pitchFamily="34" charset="-120"/>
               </a:rPr>
-              <a:t>가상 업그레이드캠퍼스 학생·학부모 VOC 100건 운영 분석 · 윤상훈 · 팀업그레이드 운영팀 지원 자료</a:t>
+              <a:t>가상 업그레이드캠퍼스 학생·학부모 VOC 100건 운영 분석 · 윤상훈 · 팀업그레이드코리아 운영팀 지원 자료</a:t>
             </a:r>
             <a:endParaRPr lang="en-US" sz="800" dirty="0"/>
           </a:p>
@@ -4585,7 +4585,7 @@
                 <a:ea typeface="Pretendard" pitchFamily="34" charset="-122"/>
                 <a:cs typeface="Pretendard" pitchFamily="34" charset="-120"/>
               </a:rPr>
-              <a:t>가상 업그레이드캠퍼스 학생·학부모 VOC 100건 운영 분석 · 윤상훈 · 팀업그레이드 운영팀 지원 자료</a:t>
+              <a:t>가상 업그레이드캠퍼스 학생·학부모 VOC 100건 운영 분석 · 윤상훈 · 팀업그레이드코리아 운영팀 지원 자료</a:t>
             </a:r>
             <a:endParaRPr lang="en-US" sz="800" dirty="0"/>
           </a:p>
@@ -5631,7 +5631,7 @@
                 <a:ea typeface="Pretendard" pitchFamily="34" charset="-122"/>
                 <a:cs typeface="Pretendard" pitchFamily="34" charset="-120"/>
               </a:rPr>
-              <a:t>가상 업그레이드캠퍼스 학생·학부모 VOC 100건 운영 분석 · 윤상훈 · 팀업그레이드 운영팀 지원 자료</a:t>
+              <a:t>가상 업그레이드캠퍼스 학생·학부모 VOC 100건 운영 분석 · 윤상훈 · 팀업그레이드코리아 운영팀 지원 자료</a:t>
             </a:r>
             <a:endParaRPr lang="en-US" sz="800" dirty="0"/>
           </a:p>
@@ -6206,7 +6206,7 @@
                 <a:ea typeface="Pretendard" pitchFamily="34" charset="-122"/>
                 <a:cs typeface="Pretendard" pitchFamily="34" charset="-120"/>
               </a:rPr>
-              <a:t>학생 100+/시즌 정성·정량 시트 운용 + 학생/학부모/원장 3그룹 보고</a:t>
+              <a:t>학생 100+/시즌 정성·정량 시트 운용 + 학생·학부모 대면 응대 사이클</a:t>
             </a:r>
             <a:endParaRPr lang="en-US" sz="900" dirty="0"/>
           </a:p>
@@ -6284,7 +6284,7 @@
                 <a:ea typeface="Pretendard" pitchFamily="34" charset="-122"/>
                 <a:cs typeface="Pretendard" pitchFamily="34" charset="-120"/>
               </a:rPr>
-              <a:t>팀업그레이드 운영팀 지원</a:t>
+              <a:t>팀업그레이드코리아 운영팀 지원</a:t>
             </a:r>
             <a:endParaRPr lang="en-US" sz="1200" dirty="0"/>
           </a:p>
@@ -7019,7 +7019,7 @@
                 <a:ea typeface="Pretendard" pitchFamily="34" charset="-122"/>
                 <a:cs typeface="Pretendard" pitchFamily="34" charset="-120"/>
               </a:rPr>
-              <a:t>가상 업그레이드캠퍼스 학생·학부모 VOC 100건 운영 분석 · 윤상훈 · 팀업그레이드 운영팀 지원 자료</a:t>
+              <a:t>가상 업그레이드캠퍼스 학생·학부모 VOC 100건 운영 분석 · 윤상훈 · 팀업그레이드코리아 운영팀 지원 자료</a:t>
             </a:r>
             <a:endParaRPr lang="en-US" sz="800" dirty="0"/>
           </a:p>
@@ -8351,7 +8351,7 @@
                 <a:ea typeface="Pretendard" pitchFamily="34" charset="-122"/>
                 <a:cs typeface="Pretendard" pitchFamily="34" charset="-120"/>
               </a:rPr>
-              <a:t>가상 업그레이드캠퍼스 학생·학부모 VOC 100건 운영 분석 · 윤상훈 · 팀업그레이드 운영팀 지원 자료</a:t>
+              <a:t>가상 업그레이드캠퍼스 학생·학부모 VOC 100건 운영 분석 · 윤상훈 · 팀업그레이드코리아 운영팀 지원 자료</a:t>
             </a:r>
             <a:endParaRPr lang="en-US" sz="800" dirty="0"/>
           </a:p>
@@ -9365,7 +9365,7 @@
                 <a:ea typeface="Pretendard" pitchFamily="34" charset="-122"/>
                 <a:cs typeface="Pretendard" pitchFamily="34" charset="-120"/>
               </a:rPr>
-              <a:t>가상 업그레이드캠퍼스 학생·학부모 VOC 100건 운영 분석 · 윤상훈 · 팀업그레이드 운영팀 지원 자료</a:t>
+              <a:t>가상 업그레이드캠퍼스 학생·학부모 VOC 100건 운영 분석 · 윤상훈 · 팀업그레이드코리아 운영팀 지원 자료</a:t>
             </a:r>
             <a:endParaRPr lang="en-US" sz="800" dirty="0"/>
           </a:p>
@@ -10203,7 +10203,7 @@
                 <a:ea typeface="Pretendard" pitchFamily="34" charset="-122"/>
                 <a:cs typeface="Pretendard" pitchFamily="34" charset="-120"/>
               </a:rPr>
-              <a:t>가상 업그레이드캠퍼스 학생·학부모 VOC 100건 운영 분석 · 윤상훈 · 팀업그레이드 운영팀 지원 자료</a:t>
+              <a:t>가상 업그레이드캠퍼스 학생·학부모 VOC 100건 운영 분석 · 윤상훈 · 팀업그레이드코리아 운영팀 지원 자료</a:t>
             </a:r>
             <a:endParaRPr lang="en-US" sz="800" dirty="0"/>
           </a:p>
@@ -11260,7 +11260,7 @@
                 <a:ea typeface="Pretendard" pitchFamily="34" charset="-122"/>
                 <a:cs typeface="Pretendard" pitchFamily="34" charset="-120"/>
               </a:rPr>
-              <a:t>가상 업그레이드캠퍼스 학생·학부모 VOC 100건 운영 분석 · 윤상훈 · 팀업그레이드 운영팀 지원 자료</a:t>
+              <a:t>가상 업그레이드캠퍼스 학생·학부모 VOC 100건 운영 분석 · 윤상훈 · 팀업그레이드코리아 운영팀 지원 자료</a:t>
             </a:r>
             <a:endParaRPr lang="en-US" sz="800" dirty="0"/>
           </a:p>
@@ -12047,7 +12047,7 @@
                 <a:ea typeface="Pretendard" pitchFamily="34" charset="-122"/>
                 <a:cs typeface="Pretendard" pitchFamily="34" charset="-120"/>
               </a:rPr>
-              <a:t>가상 업그레이드캠퍼스 학생·학부모 VOC 100건 운영 분석 · 윤상훈 · 팀업그레이드 운영팀 지원 자료</a:t>
+              <a:t>가상 업그레이드캠퍼스 학생·학부모 VOC 100건 운영 분석 · 윤상훈 · 팀업그레이드코리아 운영팀 지원 자료</a:t>
             </a:r>
             <a:endParaRPr lang="en-US" sz="800" dirty="0"/>
           </a:p>
@@ -12621,7 +12621,7 @@
                 <a:ea typeface="Pretendard" pitchFamily="34" charset="-122"/>
                 <a:cs typeface="Pretendard" pitchFamily="34" charset="-120"/>
               </a:rPr>
-              <a:t>가상 업그레이드캠퍼스 학생·학부모 VOC 100건 운영 분석 · 윤상훈 · 팀업그레이드 운영팀 지원 자료</a:t>
+              <a:t>가상 업그레이드캠퍼스 학생·학부모 VOC 100건 운영 분석 · 윤상훈 · 팀업그레이드코리아 운영팀 지원 자료</a:t>
             </a:r>
             <a:endParaRPr lang="en-US" sz="800" dirty="0"/>
           </a:p>
@@ -13415,7 +13415,7 @@
                 <a:ea typeface="Pretendard" pitchFamily="34" charset="-122"/>
                 <a:cs typeface="Pretendard" pitchFamily="34" charset="-120"/>
               </a:rPr>
-              <a:t>주 1회 학생별 진도·과제·태도 요약 리포트 (영문/한글 병기) + 월 1회 학부모 체크인 (콜/비동기 리포트 중 파일럿)</a:t>
+              <a:t>주 1회 학생별 진도·과제·태도 요약 리포트(영문/한글) + 월 1회 학부모 체크인</a:t>
             </a:r>
             <a:endParaRPr lang="en-US" sz="850" dirty="0"/>
           </a:p>
@@ -13953,7 +13953,7 @@
         </p:nvSpPr>
         <p:spPr>
           <a:xfrm>
-            <a:off x="457200" y="4617720"/>
+            <a:off x="457200" y="4525000"/>
             <a:ext cx="8229600" cy="0"/>
           </a:xfrm>
           <a:prstGeom prst="line">
@@ -13976,8 +13976,8 @@
         </p:nvSpPr>
         <p:spPr>
           <a:xfrm>
-            <a:off x="457200" y="4663440"/>
-            <a:ext cx="8229600" cy="274320"/>
+            <a:off x="457200" y="4555000"/>
+            <a:ext cx="8229600" cy="240000"/>
           </a:xfrm>
           <a:prstGeom prst="rect">
             <a:avLst/>
@@ -14060,7 +14060,7 @@
                 <a:ea typeface="Pretendard" pitchFamily="34" charset="-122"/>
                 <a:cs typeface="Pretendard" pitchFamily="34" charset="-120"/>
               </a:rPr>
-              <a:t>가상 업그레이드캠퍼스 학생·학부모 VOC 100건 운영 분석 · 윤상훈 · 팀업그레이드 운영팀 지원 자료</a:t>
+              <a:t>가상 업그레이드캠퍼스 학생·학부모 VOC 100건 운영 분석 · 윤상훈 · 팀업그레이드코리아 운영팀 지원 자료</a:t>
             </a:r>
             <a:endParaRPr lang="en-US" sz="800" dirty="0"/>
           </a:p>
